--- a/resources/class20/concurrency-whiteboard.pptx
+++ b/resources/class20/concurrency-whiteboard.pptx
@@ -109,7 +109,505 @@
       </a:defRPr>
     </a:lvl9pPr>
   </p:defaultTextStyle>
+  <p:extLst>
+    <p:ext uri="{EFAFB233-063F-42B5-8137-9DF3F51BA10A}">
+      <p15:sldGuideLst xmlns:p15="http://schemas.microsoft.com/office/powerpoint/2012/main"/>
+    </p:ext>
+  </p:extLst>
 </p:presentation>
+</file>
+
+<file path=ppt/revisionInfo.xml><?xml version="1.0" encoding="utf-8"?>
+<p1510:revInfo xmlns:a="http://schemas.openxmlformats.org/drawingml/2006/main" xmlns:r="http://schemas.openxmlformats.org/officeDocument/2006/relationships" xmlns:p1510="http://schemas.microsoft.com/office/powerpoint/2015/10/main">
+  <p1510:revLst>
+    <p1510:client id="{3D443513-34A3-4517-81BA-6634A34C7B59}" v="11" dt="2025-11-10T02:06:00.119"/>
+  </p1510:revLst>
+</p1510:revInfo>
+</file>
+
+<file path=ppt/changesInfos/changesInfo1.xml><?xml version="1.0" encoding="utf-8"?>
+<pc:chgInfo xmlns:a="http://schemas.openxmlformats.org/drawingml/2006/main" xmlns:r="http://schemas.openxmlformats.org/officeDocument/2006/relationships" xmlns:ac="http://schemas.microsoft.com/office/drawing/2013/main/command" xmlns:pc="http://schemas.microsoft.com/office/powerpoint/2013/main/command">
+  <pc:docChgLst>
+    <pc:chgData name="MacCormick, John" userId="872fc56c-f648-4c83-9a80-0bb9da7e00af" providerId="ADAL" clId="{3D443513-34A3-4517-81BA-6634A34C7B59}"/>
+    <pc:docChg chg="undo custSel modSld">
+      <pc:chgData name="MacCormick, John" userId="872fc56c-f648-4c83-9a80-0bb9da7e00af" providerId="ADAL" clId="{3D443513-34A3-4517-81BA-6634A34C7B59}" dt="2025-11-10T02:06:13.331" v="313" actId="14100"/>
+      <pc:docMkLst>
+        <pc:docMk/>
+      </pc:docMkLst>
+      <pc:sldChg chg="addSp delSp modSp mod">
+        <pc:chgData name="MacCormick, John" userId="872fc56c-f648-4c83-9a80-0bb9da7e00af" providerId="ADAL" clId="{3D443513-34A3-4517-81BA-6634A34C7B59}" dt="2025-11-10T02:00:48.343" v="109" actId="1036"/>
+        <pc:sldMkLst>
+          <pc:docMk/>
+          <pc:sldMk cId="2717755373" sldId="256"/>
+        </pc:sldMkLst>
+        <pc:spChg chg="add mod">
+          <ac:chgData name="MacCormick, John" userId="872fc56c-f648-4c83-9a80-0bb9da7e00af" providerId="ADAL" clId="{3D443513-34A3-4517-81BA-6634A34C7B59}" dt="2025-11-10T01:59:17.825" v="78" actId="1076"/>
+          <ac:spMkLst>
+            <pc:docMk/>
+            <pc:sldMk cId="2717755373" sldId="256"/>
+            <ac:spMk id="2" creationId="{02A8EDCB-A065-FC11-0415-8CD41E0BB23B}"/>
+          </ac:spMkLst>
+        </pc:spChg>
+        <pc:spChg chg="add mod">
+          <ac:chgData name="MacCormick, John" userId="872fc56c-f648-4c83-9a80-0bb9da7e00af" providerId="ADAL" clId="{3D443513-34A3-4517-81BA-6634A34C7B59}" dt="2025-11-10T02:00:36.120" v="105" actId="1076"/>
+          <ac:spMkLst>
+            <pc:docMk/>
+            <pc:sldMk cId="2717755373" sldId="256"/>
+            <ac:spMk id="10" creationId="{B7BB8686-6F00-7CC8-0C2D-55B66D1F9DAE}"/>
+          </ac:spMkLst>
+        </pc:spChg>
+        <pc:grpChg chg="mod">
+          <ac:chgData name="MacCormick, John" userId="872fc56c-f648-4c83-9a80-0bb9da7e00af" providerId="ADAL" clId="{3D443513-34A3-4517-81BA-6634A34C7B59}" dt="2025-11-10T01:59:38.313" v="83"/>
+          <ac:grpSpMkLst>
+            <pc:docMk/>
+            <pc:sldMk cId="2717755373" sldId="256"/>
+            <ac:grpSpMk id="8" creationId="{995B70EF-36A7-858E-9F45-31710892FD1A}"/>
+          </ac:grpSpMkLst>
+        </pc:grpChg>
+        <pc:grpChg chg="mod">
+          <ac:chgData name="MacCormick, John" userId="872fc56c-f648-4c83-9a80-0bb9da7e00af" providerId="ADAL" clId="{3D443513-34A3-4517-81BA-6634A34C7B59}" dt="2025-11-10T02:00:41.619" v="108"/>
+          <ac:grpSpMkLst>
+            <pc:docMk/>
+            <pc:sldMk cId="2717755373" sldId="256"/>
+            <ac:grpSpMk id="13" creationId="{CAE9D9F3-1B7D-59D6-47CC-6072086726F7}"/>
+          </ac:grpSpMkLst>
+        </pc:grpChg>
+        <pc:picChg chg="mod">
+          <ac:chgData name="MacCormick, John" userId="872fc56c-f648-4c83-9a80-0bb9da7e00af" providerId="ADAL" clId="{3D443513-34A3-4517-81BA-6634A34C7B59}" dt="2025-11-10T02:00:48.343" v="109" actId="1036"/>
+          <ac:picMkLst>
+            <pc:docMk/>
+            <pc:sldMk cId="2717755373" sldId="256"/>
+            <ac:picMk id="5" creationId="{F53521B0-ED47-4218-AC38-4100EE8B335F}"/>
+          </ac:picMkLst>
+        </pc:picChg>
+        <pc:inkChg chg="add del">
+          <ac:chgData name="MacCormick, John" userId="872fc56c-f648-4c83-9a80-0bb9da7e00af" providerId="ADAL" clId="{3D443513-34A3-4517-81BA-6634A34C7B59}" dt="2025-11-10T01:59:27.268" v="80" actId="9405"/>
+          <ac:inkMkLst>
+            <pc:docMk/>
+            <pc:sldMk cId="2717755373" sldId="256"/>
+            <ac:inkMk id="3" creationId="{533504DC-5382-CD9A-7633-5732EF3FC183}"/>
+          </ac:inkMkLst>
+        </pc:inkChg>
+        <pc:inkChg chg="add mod">
+          <ac:chgData name="MacCormick, John" userId="872fc56c-f648-4c83-9a80-0bb9da7e00af" providerId="ADAL" clId="{3D443513-34A3-4517-81BA-6634A34C7B59}" dt="2025-11-10T01:59:38.313" v="83"/>
+          <ac:inkMkLst>
+            <pc:docMk/>
+            <pc:sldMk cId="2717755373" sldId="256"/>
+            <ac:inkMk id="4" creationId="{EAB8CAC6-8515-322F-92EA-B9F27CFEF5F8}"/>
+          </ac:inkMkLst>
+        </pc:inkChg>
+        <pc:inkChg chg="add mod">
+          <ac:chgData name="MacCormick, John" userId="872fc56c-f648-4c83-9a80-0bb9da7e00af" providerId="ADAL" clId="{3D443513-34A3-4517-81BA-6634A34C7B59}" dt="2025-11-10T01:59:38.313" v="83"/>
+          <ac:inkMkLst>
+            <pc:docMk/>
+            <pc:sldMk cId="2717755373" sldId="256"/>
+            <ac:inkMk id="6" creationId="{4FF34757-BCF4-79F1-03D8-0ADD8F0074A8}"/>
+          </ac:inkMkLst>
+        </pc:inkChg>
+        <pc:inkChg chg="add del">
+          <ac:chgData name="MacCormick, John" userId="872fc56c-f648-4c83-9a80-0bb9da7e00af" providerId="ADAL" clId="{3D443513-34A3-4517-81BA-6634A34C7B59}" dt="2025-11-10T02:00:13.163" v="85" actId="9405"/>
+          <ac:inkMkLst>
+            <pc:docMk/>
+            <pc:sldMk cId="2717755373" sldId="256"/>
+            <ac:inkMk id="9" creationId="{502A9C36-9EA4-DB14-B72F-56C510178906}"/>
+          </ac:inkMkLst>
+        </pc:inkChg>
+        <pc:inkChg chg="add mod">
+          <ac:chgData name="MacCormick, John" userId="872fc56c-f648-4c83-9a80-0bb9da7e00af" providerId="ADAL" clId="{3D443513-34A3-4517-81BA-6634A34C7B59}" dt="2025-11-10T02:00:41.619" v="108"/>
+          <ac:inkMkLst>
+            <pc:docMk/>
+            <pc:sldMk cId="2717755373" sldId="256"/>
+            <ac:inkMk id="11" creationId="{13336380-686E-B594-F0FA-68BCBC1BBC1A}"/>
+          </ac:inkMkLst>
+        </pc:inkChg>
+        <pc:inkChg chg="add mod">
+          <ac:chgData name="MacCormick, John" userId="872fc56c-f648-4c83-9a80-0bb9da7e00af" providerId="ADAL" clId="{3D443513-34A3-4517-81BA-6634A34C7B59}" dt="2025-11-10T02:00:41.619" v="108"/>
+          <ac:inkMkLst>
+            <pc:docMk/>
+            <pc:sldMk cId="2717755373" sldId="256"/>
+            <ac:inkMk id="12" creationId="{2799D938-DBA3-86C4-141B-6F21CD747F84}"/>
+          </ac:inkMkLst>
+        </pc:inkChg>
+      </pc:sldChg>
+      <pc:sldChg chg="addSp delSp modSp mod">
+        <pc:chgData name="MacCormick, John" userId="872fc56c-f648-4c83-9a80-0bb9da7e00af" providerId="ADAL" clId="{3D443513-34A3-4517-81BA-6634A34C7B59}" dt="2025-11-10T02:01:49.335" v="159"/>
+        <pc:sldMkLst>
+          <pc:docMk/>
+          <pc:sldMk cId="3018007262" sldId="257"/>
+        </pc:sldMkLst>
+        <pc:spChg chg="add mod">
+          <ac:chgData name="MacCormick, John" userId="872fc56c-f648-4c83-9a80-0bb9da7e00af" providerId="ADAL" clId="{3D443513-34A3-4517-81BA-6634A34C7B59}" dt="2025-11-10T02:01:40.575" v="154" actId="1076"/>
+          <ac:spMkLst>
+            <pc:docMk/>
+            <pc:sldMk cId="3018007262" sldId="257"/>
+            <ac:spMk id="2" creationId="{F57BD87B-A091-42DC-AD6B-7A66DC2CC85F}"/>
+          </ac:spMkLst>
+        </pc:spChg>
+        <pc:grpChg chg="del mod">
+          <ac:chgData name="MacCormick, John" userId="872fc56c-f648-4c83-9a80-0bb9da7e00af" providerId="ADAL" clId="{3D443513-34A3-4517-81BA-6634A34C7B59}" dt="2025-11-10T02:01:49.335" v="159"/>
+          <ac:grpSpMkLst>
+            <pc:docMk/>
+            <pc:sldMk cId="3018007262" sldId="257"/>
+            <ac:grpSpMk id="6" creationId="{8D6587F4-B6A1-CCDE-22A7-93ECC5DC8522}"/>
+          </ac:grpSpMkLst>
+        </pc:grpChg>
+        <pc:grpChg chg="mod">
+          <ac:chgData name="MacCormick, John" userId="872fc56c-f648-4c83-9a80-0bb9da7e00af" providerId="ADAL" clId="{3D443513-34A3-4517-81BA-6634A34C7B59}" dt="2025-11-10T02:01:49.335" v="159"/>
+          <ac:grpSpMkLst>
+            <pc:docMk/>
+            <pc:sldMk cId="3018007262" sldId="257"/>
+            <ac:grpSpMk id="8" creationId="{A732A528-A575-808E-7534-F4ABEE3E7622}"/>
+          </ac:grpSpMkLst>
+        </pc:grpChg>
+        <pc:inkChg chg="add mod">
+          <ac:chgData name="MacCormick, John" userId="872fc56c-f648-4c83-9a80-0bb9da7e00af" providerId="ADAL" clId="{3D443513-34A3-4517-81BA-6634A34C7B59}" dt="2025-11-10T02:01:49.335" v="159"/>
+          <ac:inkMkLst>
+            <pc:docMk/>
+            <pc:sldMk cId="3018007262" sldId="257"/>
+            <ac:inkMk id="4" creationId="{B6C368C5-97D7-5B9B-7EE8-CFBC5250AD20}"/>
+          </ac:inkMkLst>
+        </pc:inkChg>
+        <pc:inkChg chg="add mod">
+          <ac:chgData name="MacCormick, John" userId="872fc56c-f648-4c83-9a80-0bb9da7e00af" providerId="ADAL" clId="{3D443513-34A3-4517-81BA-6634A34C7B59}" dt="2025-11-10T02:01:49.335" v="159"/>
+          <ac:inkMkLst>
+            <pc:docMk/>
+            <pc:sldMk cId="3018007262" sldId="257"/>
+            <ac:inkMk id="5" creationId="{625D3307-7B5F-61C7-0D29-86925CF54EAF}"/>
+          </ac:inkMkLst>
+        </pc:inkChg>
+        <pc:inkChg chg="add mod">
+          <ac:chgData name="MacCormick, John" userId="872fc56c-f648-4c83-9a80-0bb9da7e00af" providerId="ADAL" clId="{3D443513-34A3-4517-81BA-6634A34C7B59}" dt="2025-11-10T02:01:49.335" v="159"/>
+          <ac:inkMkLst>
+            <pc:docMk/>
+            <pc:sldMk cId="3018007262" sldId="257"/>
+            <ac:inkMk id="7" creationId="{64DE95F5-3AF5-ED73-90FD-D41A8B192886}"/>
+          </ac:inkMkLst>
+        </pc:inkChg>
+      </pc:sldChg>
+      <pc:sldChg chg="addSp modSp mod">
+        <pc:chgData name="MacCormick, John" userId="872fc56c-f648-4c83-9a80-0bb9da7e00af" providerId="ADAL" clId="{3D443513-34A3-4517-81BA-6634A34C7B59}" dt="2025-11-10T02:04:37.246" v="306"/>
+        <pc:sldMkLst>
+          <pc:docMk/>
+          <pc:sldMk cId="650784575" sldId="258"/>
+        </pc:sldMkLst>
+        <pc:spChg chg="add mod">
+          <ac:chgData name="MacCormick, John" userId="872fc56c-f648-4c83-9a80-0bb9da7e00af" providerId="ADAL" clId="{3D443513-34A3-4517-81BA-6634A34C7B59}" dt="2025-11-10T02:04:28.770" v="303" actId="20577"/>
+          <ac:spMkLst>
+            <pc:docMk/>
+            <pc:sldMk cId="650784575" sldId="258"/>
+            <ac:spMk id="2" creationId="{4CD1BE30-7238-C73E-690D-064C4287B64D}"/>
+          </ac:spMkLst>
+        </pc:spChg>
+        <pc:grpChg chg="mod">
+          <ac:chgData name="MacCormick, John" userId="872fc56c-f648-4c83-9a80-0bb9da7e00af" providerId="ADAL" clId="{3D443513-34A3-4517-81BA-6634A34C7B59}" dt="2025-11-10T02:04:37.246" v="306"/>
+          <ac:grpSpMkLst>
+            <pc:docMk/>
+            <pc:sldMk cId="650784575" sldId="258"/>
+            <ac:grpSpMk id="7" creationId="{269EEC7D-004B-B807-5740-B0285B42FBA2}"/>
+          </ac:grpSpMkLst>
+        </pc:grpChg>
+        <pc:inkChg chg="add mod">
+          <ac:chgData name="MacCormick, John" userId="872fc56c-f648-4c83-9a80-0bb9da7e00af" providerId="ADAL" clId="{3D443513-34A3-4517-81BA-6634A34C7B59}" dt="2025-11-10T02:04:37.246" v="306"/>
+          <ac:inkMkLst>
+            <pc:docMk/>
+            <pc:sldMk cId="650784575" sldId="258"/>
+            <ac:inkMk id="4" creationId="{5B5EEF17-B05B-8821-0676-F673A156F643}"/>
+          </ac:inkMkLst>
+        </pc:inkChg>
+        <pc:inkChg chg="add mod">
+          <ac:chgData name="MacCormick, John" userId="872fc56c-f648-4c83-9a80-0bb9da7e00af" providerId="ADAL" clId="{3D443513-34A3-4517-81BA-6634A34C7B59}" dt="2025-11-10T02:04:37.246" v="306"/>
+          <ac:inkMkLst>
+            <pc:docMk/>
+            <pc:sldMk cId="650784575" sldId="258"/>
+            <ac:inkMk id="6" creationId="{70680A27-66FE-65AB-083F-52E8C5106CA4}"/>
+          </ac:inkMkLst>
+        </pc:inkChg>
+      </pc:sldChg>
+      <pc:sldChg chg="addSp modSp mod">
+        <pc:chgData name="MacCormick, John" userId="872fc56c-f648-4c83-9a80-0bb9da7e00af" providerId="ADAL" clId="{3D443513-34A3-4517-81BA-6634A34C7B59}" dt="2025-11-10T02:05:33.761" v="309" actId="208"/>
+        <pc:sldMkLst>
+          <pc:docMk/>
+          <pc:sldMk cId="3021774780" sldId="259"/>
+        </pc:sldMkLst>
+        <pc:spChg chg="add mod">
+          <ac:chgData name="MacCormick, John" userId="872fc56c-f648-4c83-9a80-0bb9da7e00af" providerId="ADAL" clId="{3D443513-34A3-4517-81BA-6634A34C7B59}" dt="2025-11-10T02:05:33.761" v="309" actId="208"/>
+          <ac:spMkLst>
+            <pc:docMk/>
+            <pc:sldMk cId="3021774780" sldId="259"/>
+            <ac:spMk id="2" creationId="{E42F30A1-CEC4-3DFF-06C6-1579C31D8296}"/>
+          </ac:spMkLst>
+        </pc:spChg>
+      </pc:sldChg>
+      <pc:sldChg chg="addSp modSp mod">
+        <pc:chgData name="MacCormick, John" userId="872fc56c-f648-4c83-9a80-0bb9da7e00af" providerId="ADAL" clId="{3D443513-34A3-4517-81BA-6634A34C7B59}" dt="2025-11-10T02:06:13.331" v="313" actId="14100"/>
+        <pc:sldMkLst>
+          <pc:docMk/>
+          <pc:sldMk cId="4206913522" sldId="260"/>
+        </pc:sldMkLst>
+        <pc:spChg chg="add mod">
+          <ac:chgData name="MacCormick, John" userId="872fc56c-f648-4c83-9a80-0bb9da7e00af" providerId="ADAL" clId="{3D443513-34A3-4517-81BA-6634A34C7B59}" dt="2025-11-10T02:06:13.331" v="313" actId="14100"/>
+          <ac:spMkLst>
+            <pc:docMk/>
+            <pc:sldMk cId="4206913522" sldId="260"/>
+            <ac:spMk id="2" creationId="{C8BE3C99-C319-173B-139C-2CE18B2F960A}"/>
+          </ac:spMkLst>
+        </pc:spChg>
+      </pc:sldChg>
+    </pc:docChg>
+  </pc:docChgLst>
+</pc:chgInfo>
+</file>
+
+<file path=ppt/ink/ink1.xml><?xml version="1.0" encoding="utf-8"?>
+<inkml:ink xmlns:inkml="http://www.w3.org/2003/InkML">
+  <inkml:definitions>
+    <inkml:context xml:id="ctx0">
+      <inkml:inkSource xml:id="inkSrc0">
+        <inkml:traceFormat>
+          <inkml:channel name="X" type="integer" min="-2.14748E9" max="2.14748E9" units="cm"/>
+          <inkml:channel name="Y" type="integer" min="-2.14748E9" max="2.14748E9" units="cm"/>
+          <inkml:channel name="F" type="integer" max="32767" units="dev"/>
+        </inkml:traceFormat>
+        <inkml:channelProperties>
+          <inkml:channelProperty channel="X" name="resolution" value="1000" units="1/cm"/>
+          <inkml:channelProperty channel="Y" name="resolution" value="1000" units="1/cm"/>
+          <inkml:channelProperty channel="F" name="resolution" value="0" units="1/dev"/>
+        </inkml:channelProperties>
+      </inkml:inkSource>
+      <inkml:timestamp xml:id="ts0" timeString="2025-11-10T01:59:36.787"/>
+    </inkml:context>
+    <inkml:brush xml:id="br0">
+      <inkml:brushProperty name="width" value="0.035" units="cm"/>
+      <inkml:brushProperty name="height" value="0.035" units="cm"/>
+      <inkml:brushProperty name="color" value="#E71224"/>
+    </inkml:brush>
+  </inkml:definitions>
+  <inkml:trace contextRef="#ctx0" brushRef="#br0">1269 0 24575,'35'44'0,"-20"-5"0,-2 0 0,-1 1 0,-2 0 0,8 70 0,-5-32 0,5 13 0,-5-32 0,-2 0 0,5 116 0,-16-157 0,-1 1 0,-1-1 0,-1 0 0,0 0 0,-1 0 0,-1-1 0,0 1 0,-10 19 0,10-28 0,0 0 0,0 0 0,-1-1 0,0 0 0,-1 0 0,1-1 0,-1 0 0,-1 0 0,1 0 0,-1-1 0,-1 0 0,1-1 0,-1 0 0,0 0 0,0-1 0,-12 4 0,-236 74 0,212-72 0,1-1 0,-1-2 0,-87 2 0,-91-22 0,80 2 0,69 3 0,0-4 0,-141-40 0,197 45-1365</inkml:trace>
+</inkml:ink>
+</file>
+
+<file path=ppt/ink/ink2.xml><?xml version="1.0" encoding="utf-8"?>
+<inkml:ink xmlns:inkml="http://www.w3.org/2003/InkML">
+  <inkml:definitions>
+    <inkml:context xml:id="ctx0">
+      <inkml:inkSource xml:id="inkSrc0">
+        <inkml:traceFormat>
+          <inkml:channel name="X" type="integer" min="-2.14748E9" max="2.14748E9" units="cm"/>
+          <inkml:channel name="Y" type="integer" min="-2.14748E9" max="2.14748E9" units="cm"/>
+          <inkml:channel name="F" type="integer" max="32767" units="dev"/>
+        </inkml:traceFormat>
+        <inkml:channelProperties>
+          <inkml:channelProperty channel="X" name="resolution" value="1000" units="1/cm"/>
+          <inkml:channelProperty channel="Y" name="resolution" value="1000" units="1/cm"/>
+          <inkml:channelProperty channel="F" name="resolution" value="0" units="1/dev"/>
+        </inkml:channelProperties>
+      </inkml:inkSource>
+      <inkml:timestamp xml:id="ts0" timeString="2025-11-10T01:59:37.388"/>
+    </inkml:context>
+    <inkml:brush xml:id="br0">
+      <inkml:brushProperty name="width" value="0.035" units="cm"/>
+      <inkml:brushProperty name="height" value="0.035" units="cm"/>
+      <inkml:brushProperty name="color" value="#E71224"/>
+    </inkml:brush>
+  </inkml:definitions>
+  <inkml:trace contextRef="#ctx0" brushRef="#br0">248 6 24575,'1'-6'0,"-1"8"0,-7 14 0,-18 15 0,-47 45 0,7-9 0,41-43 0,14-13 0,0 0 0,0 0 0,-13 21 0,22-31 0,1 1 0,0-1 0,-1 0 0,1 0 0,0 1 0,0-1 0,-1 0 0,1 1 0,0-1 0,0 0 0,1 1 0,-1-1 0,0 0 0,0 0 0,1 1 0,-1-1 0,1 0 0,-1 0 0,1 1 0,-1-1 0,1 0 0,0 0 0,-1 0 0,1 0 0,0 0 0,0 0 0,0 0 0,0 0 0,0 0 0,1 0 0,42 30 0,-25-18 0,5 7 66,39 44 0,11 9-1563,-62-63-5329</inkml:trace>
+</inkml:ink>
+</file>
+
+<file path=ppt/ink/ink3.xml><?xml version="1.0" encoding="utf-8"?>
+<inkml:ink xmlns:inkml="http://www.w3.org/2003/InkML">
+  <inkml:definitions>
+    <inkml:context xml:id="ctx0">
+      <inkml:inkSource xml:id="inkSrc0">
+        <inkml:traceFormat>
+          <inkml:channel name="X" type="integer" min="-2.14748E9" max="2.14748E9" units="cm"/>
+          <inkml:channel name="Y" type="integer" min="-2.14748E9" max="2.14748E9" units="cm"/>
+          <inkml:channel name="F" type="integer" max="32767" units="dev"/>
+        </inkml:traceFormat>
+        <inkml:channelProperties>
+          <inkml:channelProperty channel="X" name="resolution" value="1000" units="1/cm"/>
+          <inkml:channelProperty channel="Y" name="resolution" value="1000" units="1/cm"/>
+          <inkml:channelProperty channel="F" name="resolution" value="0" units="1/dev"/>
+        </inkml:channelProperties>
+      </inkml:inkSource>
+      <inkml:timestamp xml:id="ts0" timeString="2025-11-10T02:00:40.682"/>
+    </inkml:context>
+    <inkml:brush xml:id="br0">
+      <inkml:brushProperty name="width" value="0.035" units="cm"/>
+      <inkml:brushProperty name="height" value="0.035" units="cm"/>
+      <inkml:brushProperty name="color" value="#E71224"/>
+    </inkml:brush>
+  </inkml:definitions>
+  <inkml:trace contextRef="#ctx0" brushRef="#br0">296 0 24575,'-1'1'0,"0"-1"0,-1 1 0,1 0 0,0 0 0,0-1 0,0 1 0,0 0 0,0 0 0,0 0 0,0 0 0,0 0 0,1 0 0,-1 0 0,0 1 0,1-1 0,-1 0 0,0 0 0,1 1 0,0-1 0,-1 0 0,1 1 0,0-1 0,-1 0 0,1 1 0,0-1 0,0 0 0,0 1 0,1 1 0,0 42 0,33 164 0,-34-192 0,0 0 0,-1 0 0,-1-1 0,-1 1 0,0-1 0,-1 1 0,-1-1 0,-1 0 0,0-1 0,-8 17 0,11-28 0,0 1 0,0 0 0,-1-1 0,1 0 0,-1 0 0,0 0 0,0 0 0,0-1 0,0 1 0,-1-1 0,0 0 0,1-1 0,-1 1 0,-6 2 0,-5 0 0,1-1 0,-1 0 0,-23 2 0,21-4 0,10-1-151,0 0-1,0-1 0,0-1 0,0 1 1,0-1-1,0-1 0,0 1 1,-14-6-1,9 1-6674</inkml:trace>
+</inkml:ink>
+</file>
+
+<file path=ppt/ink/ink4.xml><?xml version="1.0" encoding="utf-8"?>
+<inkml:ink xmlns:inkml="http://www.w3.org/2003/InkML">
+  <inkml:definitions>
+    <inkml:context xml:id="ctx0">
+      <inkml:inkSource xml:id="inkSrc0">
+        <inkml:traceFormat>
+          <inkml:channel name="X" type="integer" min="-2.14748E9" max="2.14748E9" units="cm"/>
+          <inkml:channel name="Y" type="integer" min="-2.14748E9" max="2.14748E9" units="cm"/>
+          <inkml:channel name="F" type="integer" max="32767" units="dev"/>
+        </inkml:traceFormat>
+        <inkml:channelProperties>
+          <inkml:channelProperty channel="X" name="resolution" value="1000" units="1/cm"/>
+          <inkml:channelProperty channel="Y" name="resolution" value="1000" units="1/cm"/>
+          <inkml:channelProperty channel="F" name="resolution" value="0" units="1/dev"/>
+        </inkml:channelProperties>
+      </inkml:inkSource>
+      <inkml:timestamp xml:id="ts0" timeString="2025-11-10T02:00:41.095"/>
+    </inkml:context>
+    <inkml:brush xml:id="br0">
+      <inkml:brushProperty name="width" value="0.035" units="cm"/>
+      <inkml:brushProperty name="height" value="0.035" units="cm"/>
+      <inkml:brushProperty name="color" value="#E71224"/>
+    </inkml:brush>
+  </inkml:definitions>
+  <inkml:trace contextRef="#ctx0" brushRef="#br0">69 1 24575,'-8'8'0,"1"1"0,0 0 0,1 0 0,0 1 0,0 0 0,1 0 0,1 0 0,0 0 0,-4 13 0,6-16 0,1 1 0,-1-1 0,1 1 0,0-1 0,1 1 0,0 0 0,0 0 0,0-1 0,1 1 0,1-1 0,-1 1 0,1-1 0,0 1 0,1-1 0,0 0 0,3 7 0,1-2-97,0 0-1,1-1 1,0 0-1,1 0 1,0-1-1,0 0 1,1-1-1,1 0 1,0 0-1,0-1 1,0-1-1,1 0 0,14 7 1,-8-8-6729</inkml:trace>
+</inkml:ink>
+</file>
+
+<file path=ppt/ink/ink5.xml><?xml version="1.0" encoding="utf-8"?>
+<inkml:ink xmlns:inkml="http://www.w3.org/2003/InkML">
+  <inkml:definitions>
+    <inkml:context xml:id="ctx0">
+      <inkml:inkSource xml:id="inkSrc0">
+        <inkml:traceFormat>
+          <inkml:channel name="X" type="integer" min="-2.14748E9" max="2.14748E9" units="cm"/>
+          <inkml:channel name="Y" type="integer" min="-2.14748E9" max="2.14748E9" units="cm"/>
+          <inkml:channel name="F" type="integer" max="32767" units="dev"/>
+        </inkml:traceFormat>
+        <inkml:channelProperties>
+          <inkml:channelProperty channel="X" name="resolution" value="1000" units="1/cm"/>
+          <inkml:channelProperty channel="Y" name="resolution" value="1000" units="1/cm"/>
+          <inkml:channelProperty channel="F" name="resolution" value="0" units="1/dev"/>
+        </inkml:channelProperties>
+      </inkml:inkSource>
+      <inkml:timestamp xml:id="ts0" timeString="2025-11-10T02:01:46.847"/>
+    </inkml:context>
+    <inkml:brush xml:id="br0">
+      <inkml:brushProperty name="width" value="0.035" units="cm"/>
+      <inkml:brushProperty name="height" value="0.035" units="cm"/>
+      <inkml:brushProperty name="color" value="#E71224"/>
+    </inkml:brush>
+  </inkml:definitions>
+  <inkml:trace contextRef="#ctx0" brushRef="#br0">296 45 24575,'-80'-32'0,"68"28"0,-1 1 0,0 1 0,0 1 0,-1-1 0,1 2 0,0 0 0,-21 3 0,30-2 0,0-1 0,0 1 0,0 0 0,0 1 0,0-1 0,1 1 0,-1 0 0,0 0 0,1 0 0,-1 0 0,1 0 0,0 1 0,0 0 0,0-1 0,0 1 0,0 0 0,1 1 0,-1-1 0,1 0 0,0 1 0,0-1 0,0 1 0,0 0 0,1 0 0,-1 0 0,1-1 0,-1 9 0,-3 27 0,2 0 0,2 0 0,1 0 0,8 53 0,-7-83-170,0-1-1,1 1 0,0-1 1,0 1-1,1-1 0,0 0 1,5 10-1,-2-11-6655</inkml:trace>
+</inkml:ink>
+</file>
+
+<file path=ppt/ink/ink6.xml><?xml version="1.0" encoding="utf-8"?>
+<inkml:ink xmlns:inkml="http://www.w3.org/2003/InkML">
+  <inkml:definitions>
+    <inkml:context xml:id="ctx0">
+      <inkml:inkSource xml:id="inkSrc0">
+        <inkml:traceFormat>
+          <inkml:channel name="X" type="integer" min="-2.14748E9" max="2.14748E9" units="cm"/>
+          <inkml:channel name="Y" type="integer" min="-2.14748E9" max="2.14748E9" units="cm"/>
+          <inkml:channel name="F" type="integer" max="32767" units="dev"/>
+        </inkml:traceFormat>
+        <inkml:channelProperties>
+          <inkml:channelProperty channel="X" name="resolution" value="1000" units="1/cm"/>
+          <inkml:channelProperty channel="Y" name="resolution" value="1000" units="1/cm"/>
+          <inkml:channelProperty channel="F" name="resolution" value="0" units="1/dev"/>
+        </inkml:channelProperties>
+      </inkml:inkSource>
+      <inkml:timestamp xml:id="ts0" timeString="2025-11-10T02:01:47.212"/>
+    </inkml:context>
+    <inkml:brush xml:id="br0">
+      <inkml:brushProperty name="width" value="0.035" units="cm"/>
+      <inkml:brushProperty name="height" value="0.035" units="cm"/>
+      <inkml:brushProperty name="color" value="#E71224"/>
+    </inkml:brush>
+  </inkml:definitions>
+  <inkml:trace contextRef="#ctx0" brushRef="#br0">4 0 24575,'-4'0'0</inkml:trace>
+</inkml:ink>
+</file>
+
+<file path=ppt/ink/ink7.xml><?xml version="1.0" encoding="utf-8"?>
+<inkml:ink xmlns:inkml="http://www.w3.org/2003/InkML">
+  <inkml:definitions>
+    <inkml:context xml:id="ctx0">
+      <inkml:inkSource xml:id="inkSrc0">
+        <inkml:traceFormat>
+          <inkml:channel name="X" type="integer" min="-2.14748E9" max="2.14748E9" units="cm"/>
+          <inkml:channel name="Y" type="integer" min="-2.14748E9" max="2.14748E9" units="cm"/>
+          <inkml:channel name="F" type="integer" max="32767" units="dev"/>
+        </inkml:traceFormat>
+        <inkml:channelProperties>
+          <inkml:channelProperty channel="X" name="resolution" value="1000" units="1/cm"/>
+          <inkml:channelProperty channel="Y" name="resolution" value="1000" units="1/cm"/>
+          <inkml:channelProperty channel="F" name="resolution" value="0" units="1/dev"/>
+        </inkml:channelProperties>
+      </inkml:inkSource>
+      <inkml:timestamp xml:id="ts0" timeString="2025-11-10T02:01:48.765"/>
+    </inkml:context>
+    <inkml:brush xml:id="br0">
+      <inkml:brushProperty name="width" value="0.035" units="cm"/>
+      <inkml:brushProperty name="height" value="0.035" units="cm"/>
+      <inkml:brushProperty name="color" value="#E71224"/>
+    </inkml:brush>
+  </inkml:definitions>
+  <inkml:trace contextRef="#ctx0" brushRef="#br0">264 9 24575,'4'-8'0,"5"14"0,5 17 0,-12-15 0,1 1 0,-1 0 0,-1 0 0,0 0 0,0 1 0,0-1 0,-2 0 0,1 0 0,-1 0 0,0 0 0,-1 1 0,0-1 0,0-1 0,-1 1 0,0 0 0,-1-1 0,0 1 0,-7 10 0,10-18 0,0 0 0,0 0 0,0 0 0,0-1 0,0 1 0,-1 0 0,1 0 0,0-1 0,0 1 0,-1-1 0,1 1 0,-1-1 0,1 0 0,0 0 0,-1 1 0,1-1 0,-1 0 0,1 0 0,-1 0 0,1 0 0,0-1 0,-1 1 0,1 0 0,-1-1 0,1 1 0,0 0 0,-1-1 0,1 0 0,0 1 0,-2-2 0,-48-28 0,34 19 0,9 6 0,-78-50 0,79 50 0,1 0 0,0-1 0,0 0 0,0 0 0,0 0 0,1-1 0,0 0 0,1 0 0,-7-13 0,9 11-1365</inkml:trace>
+</inkml:ink>
+</file>
+
+<file path=ppt/ink/ink8.xml><?xml version="1.0" encoding="utf-8"?>
+<inkml:ink xmlns:inkml="http://www.w3.org/2003/InkML">
+  <inkml:definitions>
+    <inkml:context xml:id="ctx0">
+      <inkml:inkSource xml:id="inkSrc0">
+        <inkml:traceFormat>
+          <inkml:channel name="X" type="integer" min="-2.14748E9" max="2.14748E9" units="cm"/>
+          <inkml:channel name="Y" type="integer" min="-2.14748E9" max="2.14748E9" units="cm"/>
+          <inkml:channel name="F" type="integer" max="32767" units="dev"/>
+        </inkml:traceFormat>
+        <inkml:channelProperties>
+          <inkml:channelProperty channel="X" name="resolution" value="1000" units="1/cm"/>
+          <inkml:channelProperty channel="Y" name="resolution" value="1000" units="1/cm"/>
+          <inkml:channelProperty channel="F" name="resolution" value="0" units="1/dev"/>
+        </inkml:channelProperties>
+      </inkml:inkSource>
+      <inkml:timestamp xml:id="ts0" timeString="2025-11-10T02:04:35.688"/>
+    </inkml:context>
+    <inkml:brush xml:id="br0">
+      <inkml:brushProperty name="width" value="0.035" units="cm"/>
+      <inkml:brushProperty name="height" value="0.035" units="cm"/>
+      <inkml:brushProperty name="color" value="#E71224"/>
+    </inkml:brush>
+  </inkml:definitions>
+  <inkml:trace contextRef="#ctx0" brushRef="#br0">1087 2152 24575,'-4'1'0,"-1"1"0,1-1 0,-1 1 0,1 0 0,0 1 0,0-1 0,0 0 0,-6 6 0,-7 4 0,0-4 0,-1 0 0,-1-2 0,1 0 0,-1 0 0,0-2 0,-32 4 0,15-5 0,-1-2 0,-59-4 0,79 0 0,0 0 0,0-1 0,0-1 0,0 0 0,0-1 0,1-1 0,0-1 0,1 0 0,-27-19 0,-7-10 0,-65-65 0,23 19 0,66 59 0,0-1 0,2-1 0,1-2 0,1 0 0,1-1 0,2-1 0,0-1 0,-25-65 0,35 72 0,1 1 0,1-2 0,1 1 0,1-1 0,1 1 0,0-36 0,20-149 0,-9 109 0,-9-139 0,-1 94 0,17-185 0,19 167 0,-5 34 0,-26 96-13,-2 26-156,-1 0 0,1 0 0,0 0 0,0 1 0,0-1 0,1 0 0,5-10 0</inkml:trace>
+</inkml:ink>
+</file>
+
+<file path=ppt/ink/ink9.xml><?xml version="1.0" encoding="utf-8"?>
+<inkml:ink xmlns:inkml="http://www.w3.org/2003/InkML">
+  <inkml:definitions>
+    <inkml:context xml:id="ctx0">
+      <inkml:inkSource xml:id="inkSrc0">
+        <inkml:traceFormat>
+          <inkml:channel name="X" type="integer" min="-2.14748E9" max="2.14748E9" units="cm"/>
+          <inkml:channel name="Y" type="integer" min="-2.14748E9" max="2.14748E9" units="cm"/>
+          <inkml:channel name="F" type="integer" max="32767" units="dev"/>
+        </inkml:traceFormat>
+        <inkml:channelProperties>
+          <inkml:channelProperty channel="X" name="resolution" value="1000" units="1/cm"/>
+          <inkml:channelProperty channel="Y" name="resolution" value="1000" units="1/cm"/>
+          <inkml:channelProperty channel="F" name="resolution" value="0" units="1/dev"/>
+        </inkml:channelProperties>
+      </inkml:inkSource>
+      <inkml:timestamp xml:id="ts0" timeString="2025-11-10T02:04:36.534"/>
+    </inkml:context>
+    <inkml:brush xml:id="br0">
+      <inkml:brushProperty name="width" value="0.035" units="cm"/>
+      <inkml:brushProperty name="height" value="0.035" units="cm"/>
+      <inkml:brushProperty name="color" value="#E71224"/>
+    </inkml:brush>
+  </inkml:definitions>
+  <inkml:trace contextRef="#ctx0" brushRef="#br0">77 393 24575,'-3'3'0,"-8"9"0,-1-1 0,-1-1 0,-21 15 0,31-28 0,7-10 0,8-11 0,25-29 0,2 1 0,74-75 0,-11 13 0,-85 91 0,-14 17 0,0 1 0,1 0 0,-1 0 0,1 1 0,0-1 0,9-7 0,-11 12 0,-1-1 0,0 1 0,0-1 0,0 1 0,0 0 0,1 0 0,-1-1 0,0 1 0,0 0 0,1 0 0,-1 0 0,0 0 0,0 0 0,0 1 0,1-1 0,-1 0 0,0 0 0,0 1 0,0-1 0,1 1 0,-1-1 0,0 1 0,0 0 0,0-1 0,0 1 0,0 0 0,0 0 0,0-1 0,-1 1 0,1 0 0,0 0 0,0 0 0,-1 0 0,1 0 0,0 0 0,-1 1 0,1-1 0,-1 0 0,1 2 0,9 18 0,0 0 0,-2 1 0,0 0 0,-1 0 0,3 25 0,3 6 0,21 80 0,-32-126 14,-2 0 0,1 1 0,-1-1-1,0 0 1,-1 0 0,0 0 0,0 1 0,-3 11-1,2-12-199,0 0 0,1 0 0,0 0 0,0 1-1,0-1 1,1 1 0,2 13 0,2-7-6640</inkml:trace>
+</inkml:ink>
 </file>
 
 <file path=ppt/slideLayouts/slideLayout1.xml><?xml version="1.0" encoding="utf-8"?>
@@ -259,7 +757,7 @@
           <a:p>
             <a:fld id="{C27FD685-99BE-4ED5-838E-17FE389079E1}" type="datetimeFigureOut">
               <a:rPr lang="en-US" smtClean="0"/>
-              <a:t>4/7/2022</a:t>
+              <a:t>11/9/2025</a:t>
             </a:fld>
             <a:endParaRPr lang="en-US"/>
           </a:p>
@@ -457,7 +955,7 @@
           <a:p>
             <a:fld id="{C27FD685-99BE-4ED5-838E-17FE389079E1}" type="datetimeFigureOut">
               <a:rPr lang="en-US" smtClean="0"/>
-              <a:t>4/7/2022</a:t>
+              <a:t>11/9/2025</a:t>
             </a:fld>
             <a:endParaRPr lang="en-US"/>
           </a:p>
@@ -665,7 +1163,7 @@
           <a:p>
             <a:fld id="{C27FD685-99BE-4ED5-838E-17FE389079E1}" type="datetimeFigureOut">
               <a:rPr lang="en-US" smtClean="0"/>
-              <a:t>4/7/2022</a:t>
+              <a:t>11/9/2025</a:t>
             </a:fld>
             <a:endParaRPr lang="en-US"/>
           </a:p>
@@ -863,7 +1361,7 @@
           <a:p>
             <a:fld id="{C27FD685-99BE-4ED5-838E-17FE389079E1}" type="datetimeFigureOut">
               <a:rPr lang="en-US" smtClean="0"/>
-              <a:t>4/7/2022</a:t>
+              <a:t>11/9/2025</a:t>
             </a:fld>
             <a:endParaRPr lang="en-US"/>
           </a:p>
@@ -1138,7 +1636,7 @@
           <a:p>
             <a:fld id="{C27FD685-99BE-4ED5-838E-17FE389079E1}" type="datetimeFigureOut">
               <a:rPr lang="en-US" smtClean="0"/>
-              <a:t>4/7/2022</a:t>
+              <a:t>11/9/2025</a:t>
             </a:fld>
             <a:endParaRPr lang="en-US"/>
           </a:p>
@@ -1403,7 +1901,7 @@
           <a:p>
             <a:fld id="{C27FD685-99BE-4ED5-838E-17FE389079E1}" type="datetimeFigureOut">
               <a:rPr lang="en-US" smtClean="0"/>
-              <a:t>4/7/2022</a:t>
+              <a:t>11/9/2025</a:t>
             </a:fld>
             <a:endParaRPr lang="en-US"/>
           </a:p>
@@ -1815,7 +2313,7 @@
           <a:p>
             <a:fld id="{C27FD685-99BE-4ED5-838E-17FE389079E1}" type="datetimeFigureOut">
               <a:rPr lang="en-US" smtClean="0"/>
-              <a:t>4/7/2022</a:t>
+              <a:t>11/9/2025</a:t>
             </a:fld>
             <a:endParaRPr lang="en-US"/>
           </a:p>
@@ -1956,7 +2454,7 @@
           <a:p>
             <a:fld id="{C27FD685-99BE-4ED5-838E-17FE389079E1}" type="datetimeFigureOut">
               <a:rPr lang="en-US" smtClean="0"/>
-              <a:t>4/7/2022</a:t>
+              <a:t>11/9/2025</a:t>
             </a:fld>
             <a:endParaRPr lang="en-US"/>
           </a:p>
@@ -2069,7 +2567,7 @@
           <a:p>
             <a:fld id="{C27FD685-99BE-4ED5-838E-17FE389079E1}" type="datetimeFigureOut">
               <a:rPr lang="en-US" smtClean="0"/>
-              <a:t>4/7/2022</a:t>
+              <a:t>11/9/2025</a:t>
             </a:fld>
             <a:endParaRPr lang="en-US"/>
           </a:p>
@@ -2380,7 +2878,7 @@
           <a:p>
             <a:fld id="{C27FD685-99BE-4ED5-838E-17FE389079E1}" type="datetimeFigureOut">
               <a:rPr lang="en-US" smtClean="0"/>
-              <a:t>4/7/2022</a:t>
+              <a:t>11/9/2025</a:t>
             </a:fld>
             <a:endParaRPr lang="en-US"/>
           </a:p>
@@ -2668,7 +3166,7 @@
           <a:p>
             <a:fld id="{C27FD685-99BE-4ED5-838E-17FE389079E1}" type="datetimeFigureOut">
               <a:rPr lang="en-US" smtClean="0"/>
-              <a:t>4/7/2022</a:t>
+              <a:t>11/9/2025</a:t>
             </a:fld>
             <a:endParaRPr lang="en-US"/>
           </a:p>
@@ -2909,7 +3407,7 @@
           <a:p>
             <a:fld id="{C27FD685-99BE-4ED5-838E-17FE389079E1}" type="datetimeFigureOut">
               <a:rPr lang="en-US" smtClean="0"/>
-              <a:t>4/7/2022</a:t>
+              <a:t>11/9/2025</a:t>
             </a:fld>
             <a:endParaRPr lang="en-US"/>
           </a:p>
@@ -3348,7 +3846,7 @@
         </p:blipFill>
         <p:spPr>
           <a:xfrm>
-            <a:off x="0" y="488667"/>
+            <a:off x="0" y="496041"/>
             <a:ext cx="6858000" cy="2400865"/>
           </a:xfrm>
           <a:prstGeom prst="rect">
@@ -3386,6 +3884,322 @@
           </a:prstGeom>
         </p:spPr>
       </p:pic>
+      <p:sp>
+        <p:nvSpPr>
+          <p:cNvPr id="2" name="TextBox 1">
+            <a:extLst>
+              <a:ext uri="{FF2B5EF4-FFF2-40B4-BE49-F238E27FC236}">
+                <a16:creationId xmlns:a16="http://schemas.microsoft.com/office/drawing/2014/main" id="{02A8EDCB-A065-FC11-0415-8CD41E0BB23B}"/>
+              </a:ext>
+            </a:extLst>
+          </p:cNvPr>
+          <p:cNvSpPr txBox="1"/>
+          <p:nvPr/>
+        </p:nvSpPr>
+        <p:spPr>
+          <a:xfrm>
+            <a:off x="4129548" y="572808"/>
+            <a:ext cx="2728452" cy="430887"/>
+          </a:xfrm>
+          <a:prstGeom prst="rect">
+            <a:avLst/>
+          </a:prstGeom>
+          <a:noFill/>
+        </p:spPr>
+        <p:txBody>
+          <a:bodyPr wrap="square" rtlCol="0">
+            <a:spAutoFit/>
+          </a:bodyPr>
+          <a:lstStyle/>
+          <a:p>
+            <a:r>
+              <a:rPr lang="en-US" sz="1100" dirty="0"/>
+              <a:t>Postgres doesn’t allow SET; use BEGIN or equivalently START TRASACTION</a:t>
+            </a:r>
+          </a:p>
+        </p:txBody>
+      </p:sp>
+      <p:grpSp>
+        <p:nvGrpSpPr>
+          <p:cNvPr id="8" name="Group 7">
+            <a:extLst>
+              <a:ext uri="{FF2B5EF4-FFF2-40B4-BE49-F238E27FC236}">
+                <a16:creationId xmlns:a16="http://schemas.microsoft.com/office/drawing/2014/main" id="{995B70EF-36A7-858E-9F45-31710892FD1A}"/>
+              </a:ext>
+            </a:extLst>
+          </p:cNvPr>
+          <p:cNvGrpSpPr/>
+          <p:nvPr/>
+        </p:nvGrpSpPr>
+        <p:grpSpPr>
+          <a:xfrm>
+            <a:off x="5315806" y="973254"/>
+            <a:ext cx="536040" cy="498600"/>
+            <a:chOff x="5315806" y="973254"/>
+            <a:chExt cx="536040" cy="498600"/>
+          </a:xfrm>
+        </p:grpSpPr>
+        <mc:AlternateContent xmlns:mc="http://schemas.openxmlformats.org/markup-compatibility/2006">
+          <mc:Choice xmlns:p14="http://schemas.microsoft.com/office/powerpoint/2010/main" Requires="p14">
+            <p:contentPart p14:bwMode="auto" r:id="rId4">
+              <p14:nvContentPartPr>
+                <p14:cNvPr id="4" name="Ink 3">
+                  <a:extLst>
+                    <a:ext uri="{FF2B5EF4-FFF2-40B4-BE49-F238E27FC236}">
+                      <a16:creationId xmlns:a16="http://schemas.microsoft.com/office/drawing/2014/main" id="{EAB8CAC6-8515-322F-92EA-B9F27CFEF5F8}"/>
+                    </a:ext>
+                  </a:extLst>
+                </p14:cNvPr>
+                <p14:cNvContentPartPr/>
+                <p14:nvPr/>
+              </p14:nvContentPartPr>
+              <p14:xfrm>
+                <a:off x="5332006" y="973254"/>
+                <a:ext cx="519840" cy="428400"/>
+              </p14:xfrm>
+            </p:contentPart>
+          </mc:Choice>
+          <mc:Fallback>
+            <p:pic>
+              <p:nvPicPr>
+                <p:cNvPr id="4" name="Ink 3">
+                  <a:extLst>
+                    <a:ext uri="{FF2B5EF4-FFF2-40B4-BE49-F238E27FC236}">
+                      <a16:creationId xmlns:a16="http://schemas.microsoft.com/office/drawing/2014/main" id="{EAB8CAC6-8515-322F-92EA-B9F27CFEF5F8}"/>
+                    </a:ext>
+                  </a:extLst>
+                </p:cNvPr>
+                <p:cNvPicPr/>
+                <p:nvPr/>
+              </p:nvPicPr>
+              <p:blipFill>
+                <a:blip r:embed="rId5"/>
+                <a:stretch>
+                  <a:fillRect/>
+                </a:stretch>
+              </p:blipFill>
+              <p:spPr>
+                <a:xfrm>
+                  <a:off x="5325886" y="967134"/>
+                  <a:ext cx="532080" cy="440640"/>
+                </a:xfrm>
+                <a:prstGeom prst="rect">
+                  <a:avLst/>
+                </a:prstGeom>
+              </p:spPr>
+            </p:pic>
+          </mc:Fallback>
+        </mc:AlternateContent>
+        <mc:AlternateContent xmlns:mc="http://schemas.openxmlformats.org/markup-compatibility/2006">
+          <mc:Choice xmlns:p14="http://schemas.microsoft.com/office/powerpoint/2010/main" Requires="p14">
+            <p:contentPart p14:bwMode="auto" r:id="rId6">
+              <p14:nvContentPartPr>
+                <p14:cNvPr id="6" name="Ink 5">
+                  <a:extLst>
+                    <a:ext uri="{FF2B5EF4-FFF2-40B4-BE49-F238E27FC236}">
+                      <a16:creationId xmlns:a16="http://schemas.microsoft.com/office/drawing/2014/main" id="{4FF34757-BCF4-79F1-03D8-0ADD8F0074A8}"/>
+                    </a:ext>
+                  </a:extLst>
+                </p14:cNvPr>
+                <p14:cNvContentPartPr/>
+                <p14:nvPr/>
+              </p14:nvContentPartPr>
+              <p14:xfrm>
+                <a:off x="5315806" y="1281054"/>
+                <a:ext cx="90360" cy="190800"/>
+              </p14:xfrm>
+            </p:contentPart>
+          </mc:Choice>
+          <mc:Fallback>
+            <p:pic>
+              <p:nvPicPr>
+                <p:cNvPr id="6" name="Ink 5">
+                  <a:extLst>
+                    <a:ext uri="{FF2B5EF4-FFF2-40B4-BE49-F238E27FC236}">
+                      <a16:creationId xmlns:a16="http://schemas.microsoft.com/office/drawing/2014/main" id="{4FF34757-BCF4-79F1-03D8-0ADD8F0074A8}"/>
+                    </a:ext>
+                  </a:extLst>
+                </p:cNvPr>
+                <p:cNvPicPr/>
+                <p:nvPr/>
+              </p:nvPicPr>
+              <p:blipFill>
+                <a:blip r:embed="rId7"/>
+                <a:stretch>
+                  <a:fillRect/>
+                </a:stretch>
+              </p:blipFill>
+              <p:spPr>
+                <a:xfrm>
+                  <a:off x="5309686" y="1274934"/>
+                  <a:ext cx="102600" cy="203040"/>
+                </a:xfrm>
+                <a:prstGeom prst="rect">
+                  <a:avLst/>
+                </a:prstGeom>
+              </p:spPr>
+            </p:pic>
+          </mc:Fallback>
+        </mc:AlternateContent>
+      </p:grpSp>
+      <p:sp>
+        <p:nvSpPr>
+          <p:cNvPr id="10" name="TextBox 9">
+            <a:extLst>
+              <a:ext uri="{FF2B5EF4-FFF2-40B4-BE49-F238E27FC236}">
+                <a16:creationId xmlns:a16="http://schemas.microsoft.com/office/drawing/2014/main" id="{B7BB8686-6F00-7CC8-0C2D-55B66D1F9DAE}"/>
+              </a:ext>
+            </a:extLst>
+          </p:cNvPr>
+          <p:cNvSpPr txBox="1"/>
+          <p:nvPr/>
+        </p:nvSpPr>
+        <p:spPr>
+          <a:xfrm>
+            <a:off x="2587354" y="357862"/>
+            <a:ext cx="2728452" cy="261610"/>
+          </a:xfrm>
+          <a:prstGeom prst="rect">
+            <a:avLst/>
+          </a:prstGeom>
+          <a:noFill/>
+        </p:spPr>
+        <p:txBody>
+          <a:bodyPr wrap="square" rtlCol="0">
+            <a:spAutoFit/>
+          </a:bodyPr>
+          <a:lstStyle/>
+          <a:p>
+            <a:r>
+              <a:rPr lang="en-US" sz="1100" dirty="0"/>
+              <a:t>and Postgres</a:t>
+            </a:r>
+          </a:p>
+        </p:txBody>
+      </p:sp>
+      <p:grpSp>
+        <p:nvGrpSpPr>
+          <p:cNvPr id="13" name="Group 12">
+            <a:extLst>
+              <a:ext uri="{FF2B5EF4-FFF2-40B4-BE49-F238E27FC236}">
+                <a16:creationId xmlns:a16="http://schemas.microsoft.com/office/drawing/2014/main" id="{CAE9D9F3-1B7D-59D6-47CC-6072086726F7}"/>
+              </a:ext>
+            </a:extLst>
+          </p:cNvPr>
+          <p:cNvGrpSpPr/>
+          <p:nvPr/>
+        </p:nvGrpSpPr>
+        <p:grpSpPr>
+          <a:xfrm>
+            <a:off x="3109366" y="604614"/>
+            <a:ext cx="134280" cy="280080"/>
+            <a:chOff x="3109366" y="604614"/>
+            <a:chExt cx="134280" cy="280080"/>
+          </a:xfrm>
+        </p:grpSpPr>
+        <mc:AlternateContent xmlns:mc="http://schemas.openxmlformats.org/markup-compatibility/2006">
+          <mc:Choice xmlns:p14="http://schemas.microsoft.com/office/powerpoint/2010/main" Requires="p14">
+            <p:contentPart p14:bwMode="auto" r:id="rId8">
+              <p14:nvContentPartPr>
+                <p14:cNvPr id="11" name="Ink 10">
+                  <a:extLst>
+                    <a:ext uri="{FF2B5EF4-FFF2-40B4-BE49-F238E27FC236}">
+                      <a16:creationId xmlns:a16="http://schemas.microsoft.com/office/drawing/2014/main" id="{13336380-686E-B594-F0FA-68BCBC1BBC1A}"/>
+                    </a:ext>
+                  </a:extLst>
+                </p14:cNvPr>
+                <p14:cNvContentPartPr/>
+                <p14:nvPr/>
+              </p14:nvContentPartPr>
+              <p14:xfrm>
+                <a:off x="3130606" y="604614"/>
+                <a:ext cx="113040" cy="203040"/>
+              </p14:xfrm>
+            </p:contentPart>
+          </mc:Choice>
+          <mc:Fallback>
+            <p:pic>
+              <p:nvPicPr>
+                <p:cNvPr id="11" name="Ink 10">
+                  <a:extLst>
+                    <a:ext uri="{FF2B5EF4-FFF2-40B4-BE49-F238E27FC236}">
+                      <a16:creationId xmlns:a16="http://schemas.microsoft.com/office/drawing/2014/main" id="{13336380-686E-B594-F0FA-68BCBC1BBC1A}"/>
+                    </a:ext>
+                  </a:extLst>
+                </p:cNvPr>
+                <p:cNvPicPr/>
+                <p:nvPr/>
+              </p:nvPicPr>
+              <p:blipFill>
+                <a:blip r:embed="rId9"/>
+                <a:stretch>
+                  <a:fillRect/>
+                </a:stretch>
+              </p:blipFill>
+              <p:spPr>
+                <a:xfrm>
+                  <a:off x="3124486" y="598494"/>
+                  <a:ext cx="125280" cy="215280"/>
+                </a:xfrm>
+                <a:prstGeom prst="rect">
+                  <a:avLst/>
+                </a:prstGeom>
+              </p:spPr>
+            </p:pic>
+          </mc:Fallback>
+        </mc:AlternateContent>
+        <mc:AlternateContent xmlns:mc="http://schemas.openxmlformats.org/markup-compatibility/2006">
+          <mc:Choice xmlns:p14="http://schemas.microsoft.com/office/powerpoint/2010/main" Requires="p14">
+            <p:contentPart p14:bwMode="auto" r:id="rId10">
+              <p14:nvContentPartPr>
+                <p14:cNvPr id="12" name="Ink 11">
+                  <a:extLst>
+                    <a:ext uri="{FF2B5EF4-FFF2-40B4-BE49-F238E27FC236}">
+                      <a16:creationId xmlns:a16="http://schemas.microsoft.com/office/drawing/2014/main" id="{2799D938-DBA3-86C4-141B-6F21CD747F84}"/>
+                    </a:ext>
+                  </a:extLst>
+                </p14:cNvPr>
+                <p14:cNvContentPartPr/>
+                <p14:nvPr/>
+              </p14:nvContentPartPr>
+              <p14:xfrm>
+                <a:off x="3109366" y="744654"/>
+                <a:ext cx="67680" cy="140040"/>
+              </p14:xfrm>
+            </p:contentPart>
+          </mc:Choice>
+          <mc:Fallback>
+            <p:pic>
+              <p:nvPicPr>
+                <p:cNvPr id="12" name="Ink 11">
+                  <a:extLst>
+                    <a:ext uri="{FF2B5EF4-FFF2-40B4-BE49-F238E27FC236}">
+                      <a16:creationId xmlns:a16="http://schemas.microsoft.com/office/drawing/2014/main" id="{2799D938-DBA3-86C4-141B-6F21CD747F84}"/>
+                    </a:ext>
+                  </a:extLst>
+                </p:cNvPr>
+                <p:cNvPicPr/>
+                <p:nvPr/>
+              </p:nvPicPr>
+              <p:blipFill>
+                <a:blip r:embed="rId11"/>
+                <a:stretch>
+                  <a:fillRect/>
+                </a:stretch>
+              </p:blipFill>
+              <p:spPr>
+                <a:xfrm>
+                  <a:off x="3103246" y="738534"/>
+                  <a:ext cx="79920" cy="152280"/>
+                </a:xfrm>
+                <a:prstGeom prst="rect">
+                  <a:avLst/>
+                </a:prstGeom>
+              </p:spPr>
+            </p:pic>
+          </mc:Fallback>
+        </mc:AlternateContent>
+      </p:grpSp>
     </p:spTree>
     <p:extLst>
       <p:ext uri="{BB962C8B-B14F-4D97-AF65-F5344CB8AC3E}">
@@ -3446,6 +4260,219 @@
           </a:prstGeom>
         </p:spPr>
       </p:pic>
+      <p:sp>
+        <p:nvSpPr>
+          <p:cNvPr id="2" name="TextBox 1">
+            <a:extLst>
+              <a:ext uri="{FF2B5EF4-FFF2-40B4-BE49-F238E27FC236}">
+                <a16:creationId xmlns:a16="http://schemas.microsoft.com/office/drawing/2014/main" id="{F57BD87B-A091-42DC-AD6B-7A66DC2CC85F}"/>
+              </a:ext>
+            </a:extLst>
+          </p:cNvPr>
+          <p:cNvSpPr txBox="1"/>
+          <p:nvPr/>
+        </p:nvSpPr>
+        <p:spPr>
+          <a:xfrm>
+            <a:off x="1246239" y="3119283"/>
+            <a:ext cx="2595198" cy="276999"/>
+          </a:xfrm>
+          <a:prstGeom prst="rect">
+            <a:avLst/>
+          </a:prstGeom>
+          <a:noFill/>
+        </p:spPr>
+        <p:txBody>
+          <a:bodyPr wrap="none" rtlCol="0">
+            <a:spAutoFit/>
+          </a:bodyPr>
+          <a:lstStyle/>
+          <a:p>
+            <a:r>
+              <a:rPr lang="en-US" sz="1200" dirty="0">
+                <a:solidFill>
+                  <a:srgbClr val="FF0000"/>
+                </a:solidFill>
+              </a:rPr>
+              <a:t>SET only works in MySQL, not Postgres</a:t>
+            </a:r>
+          </a:p>
+        </p:txBody>
+      </p:sp>
+      <p:grpSp>
+        <p:nvGrpSpPr>
+          <p:cNvPr id="8" name="Group 7">
+            <a:extLst>
+              <a:ext uri="{FF2B5EF4-FFF2-40B4-BE49-F238E27FC236}">
+                <a16:creationId xmlns:a16="http://schemas.microsoft.com/office/drawing/2014/main" id="{A732A528-A575-808E-7534-F4ABEE3E7622}"/>
+              </a:ext>
+            </a:extLst>
+          </p:cNvPr>
+          <p:cNvGrpSpPr/>
+          <p:nvPr/>
+        </p:nvGrpSpPr>
+        <p:grpSpPr>
+          <a:xfrm>
+            <a:off x="988966" y="3228422"/>
+            <a:ext cx="161640" cy="180720"/>
+            <a:chOff x="988966" y="3228422"/>
+            <a:chExt cx="161640" cy="180720"/>
+          </a:xfrm>
+        </p:grpSpPr>
+        <mc:AlternateContent xmlns:mc="http://schemas.openxmlformats.org/markup-compatibility/2006">
+          <mc:Choice xmlns:p14="http://schemas.microsoft.com/office/powerpoint/2010/main" Requires="p14">
+            <p:contentPart p14:bwMode="auto" r:id="rId3">
+              <p14:nvContentPartPr>
+                <p14:cNvPr id="4" name="Ink 3">
+                  <a:extLst>
+                    <a:ext uri="{FF2B5EF4-FFF2-40B4-BE49-F238E27FC236}">
+                      <a16:creationId xmlns:a16="http://schemas.microsoft.com/office/drawing/2014/main" id="{B6C368C5-97D7-5B9B-7EE8-CFBC5250AD20}"/>
+                    </a:ext>
+                  </a:extLst>
+                </p14:cNvPr>
+                <p14:cNvContentPartPr/>
+                <p14:nvPr/>
+              </p14:nvContentPartPr>
+              <p14:xfrm>
+                <a:off x="1044046" y="3228422"/>
+                <a:ext cx="106560" cy="149760"/>
+              </p14:xfrm>
+            </p:contentPart>
+          </mc:Choice>
+          <mc:Fallback>
+            <p:pic>
+              <p:nvPicPr>
+                <p:cNvPr id="4" name="Ink 3">
+                  <a:extLst>
+                    <a:ext uri="{FF2B5EF4-FFF2-40B4-BE49-F238E27FC236}">
+                      <a16:creationId xmlns:a16="http://schemas.microsoft.com/office/drawing/2014/main" id="{B6C368C5-97D7-5B9B-7EE8-CFBC5250AD20}"/>
+                    </a:ext>
+                  </a:extLst>
+                </p:cNvPr>
+                <p:cNvPicPr/>
+                <p:nvPr/>
+              </p:nvPicPr>
+              <p:blipFill>
+                <a:blip r:embed="rId4"/>
+                <a:stretch>
+                  <a:fillRect/>
+                </a:stretch>
+              </p:blipFill>
+              <p:spPr>
+                <a:xfrm>
+                  <a:off x="1037926" y="3222302"/>
+                  <a:ext cx="118800" cy="162000"/>
+                </a:xfrm>
+                <a:prstGeom prst="rect">
+                  <a:avLst/>
+                </a:prstGeom>
+              </p:spPr>
+            </p:pic>
+          </mc:Fallback>
+        </mc:AlternateContent>
+        <mc:AlternateContent xmlns:mc="http://schemas.openxmlformats.org/markup-compatibility/2006">
+          <mc:Choice xmlns:p14="http://schemas.microsoft.com/office/powerpoint/2010/main" Requires="p14">
+            <p:contentPart p14:bwMode="auto" r:id="rId5">
+              <p14:nvContentPartPr>
+                <p14:cNvPr id="5" name="Ink 4">
+                  <a:extLst>
+                    <a:ext uri="{FF2B5EF4-FFF2-40B4-BE49-F238E27FC236}">
+                      <a16:creationId xmlns:a16="http://schemas.microsoft.com/office/drawing/2014/main" id="{625D3307-7B5F-61C7-0D29-86925CF54EAF}"/>
+                    </a:ext>
+                  </a:extLst>
+                </p14:cNvPr>
+                <p14:cNvContentPartPr/>
+                <p14:nvPr/>
+              </p14:nvContentPartPr>
+              <p14:xfrm>
+                <a:off x="1001566" y="3362702"/>
+                <a:ext cx="1800" cy="360"/>
+              </p14:xfrm>
+            </p:contentPart>
+          </mc:Choice>
+          <mc:Fallback>
+            <p:pic>
+              <p:nvPicPr>
+                <p:cNvPr id="5" name="Ink 4">
+                  <a:extLst>
+                    <a:ext uri="{FF2B5EF4-FFF2-40B4-BE49-F238E27FC236}">
+                      <a16:creationId xmlns:a16="http://schemas.microsoft.com/office/drawing/2014/main" id="{625D3307-7B5F-61C7-0D29-86925CF54EAF}"/>
+                    </a:ext>
+                  </a:extLst>
+                </p:cNvPr>
+                <p:cNvPicPr/>
+                <p:nvPr/>
+              </p:nvPicPr>
+              <p:blipFill>
+                <a:blip r:embed="rId6"/>
+                <a:stretch>
+                  <a:fillRect/>
+                </a:stretch>
+              </p:blipFill>
+              <p:spPr>
+                <a:xfrm>
+                  <a:off x="995446" y="3356582"/>
+                  <a:ext cx="14040" cy="12600"/>
+                </a:xfrm>
+                <a:prstGeom prst="rect">
+                  <a:avLst/>
+                </a:prstGeom>
+              </p:spPr>
+            </p:pic>
+          </mc:Fallback>
+        </mc:AlternateContent>
+        <mc:AlternateContent xmlns:mc="http://schemas.openxmlformats.org/markup-compatibility/2006">
+          <mc:Choice xmlns:p14="http://schemas.microsoft.com/office/powerpoint/2010/main" Requires="p14">
+            <p:contentPart p14:bwMode="auto" r:id="rId7">
+              <p14:nvContentPartPr>
+                <p14:cNvPr id="7" name="Ink 6">
+                  <a:extLst>
+                    <a:ext uri="{FF2B5EF4-FFF2-40B4-BE49-F238E27FC236}">
+                      <a16:creationId xmlns:a16="http://schemas.microsoft.com/office/drawing/2014/main" id="{64DE95F5-3AF5-ED73-90FD-D41A8B192886}"/>
+                    </a:ext>
+                  </a:extLst>
+                </p14:cNvPr>
+                <p14:cNvContentPartPr/>
+                <p14:nvPr/>
+              </p14:nvContentPartPr>
+              <p14:xfrm>
+                <a:off x="988966" y="3329942"/>
+                <a:ext cx="108720" cy="79200"/>
+              </p14:xfrm>
+            </p:contentPart>
+          </mc:Choice>
+          <mc:Fallback>
+            <p:pic>
+              <p:nvPicPr>
+                <p:cNvPr id="7" name="Ink 6">
+                  <a:extLst>
+                    <a:ext uri="{FF2B5EF4-FFF2-40B4-BE49-F238E27FC236}">
+                      <a16:creationId xmlns:a16="http://schemas.microsoft.com/office/drawing/2014/main" id="{64DE95F5-3AF5-ED73-90FD-D41A8B192886}"/>
+                    </a:ext>
+                  </a:extLst>
+                </p:cNvPr>
+                <p:cNvPicPr/>
+                <p:nvPr/>
+              </p:nvPicPr>
+              <p:blipFill>
+                <a:blip r:embed="rId8"/>
+                <a:stretch>
+                  <a:fillRect/>
+                </a:stretch>
+              </p:blipFill>
+              <p:spPr>
+                <a:xfrm>
+                  <a:off x="982846" y="3323822"/>
+                  <a:ext cx="120960" cy="91440"/>
+                </a:xfrm>
+                <a:prstGeom prst="rect">
+                  <a:avLst/>
+                </a:prstGeom>
+              </p:spPr>
+            </p:pic>
+          </mc:Fallback>
+        </mc:AlternateContent>
+      </p:grpSp>
     </p:spTree>
     <p:extLst>
       <p:ext uri="{BB962C8B-B14F-4D97-AF65-F5344CB8AC3E}">
@@ -3536,6 +4563,172 @@
           </a:prstGeom>
         </p:spPr>
       </p:pic>
+      <p:sp>
+        <p:nvSpPr>
+          <p:cNvPr id="2" name="TextBox 1">
+            <a:extLst>
+              <a:ext uri="{FF2B5EF4-FFF2-40B4-BE49-F238E27FC236}">
+                <a16:creationId xmlns:a16="http://schemas.microsoft.com/office/drawing/2014/main" id="{4CD1BE30-7238-C73E-690D-064C4287B64D}"/>
+              </a:ext>
+            </a:extLst>
+          </p:cNvPr>
+          <p:cNvSpPr txBox="1"/>
+          <p:nvPr/>
+        </p:nvSpPr>
+        <p:spPr>
+          <a:xfrm>
+            <a:off x="737419" y="6319684"/>
+            <a:ext cx="5126403" cy="307777"/>
+          </a:xfrm>
+          <a:prstGeom prst="rect">
+            <a:avLst/>
+          </a:prstGeom>
+          <a:noFill/>
+        </p:spPr>
+        <p:txBody>
+          <a:bodyPr wrap="none" rtlCol="0">
+            <a:spAutoFit/>
+          </a:bodyPr>
+          <a:lstStyle/>
+          <a:p>
+            <a:r>
+              <a:rPr lang="en-US" sz="1400" dirty="0"/>
+              <a:t>Postgres </a:t>
+            </a:r>
+            <a:r>
+              <a:rPr lang="en-US" sz="1400" i="1" dirty="0"/>
+              <a:t>does</a:t>
+            </a:r>
+            <a:r>
+              <a:rPr lang="en-US" sz="1400" dirty="0"/>
+              <a:t> support FOR SHARE and FOR UPDATE, just like MySQL</a:t>
+            </a:r>
+          </a:p>
+        </p:txBody>
+      </p:sp>
+      <p:grpSp>
+        <p:nvGrpSpPr>
+          <p:cNvPr id="7" name="Group 6">
+            <a:extLst>
+              <a:ext uri="{FF2B5EF4-FFF2-40B4-BE49-F238E27FC236}">
+                <a16:creationId xmlns:a16="http://schemas.microsoft.com/office/drawing/2014/main" id="{269EEC7D-004B-B807-5740-B0285B42FBA2}"/>
+              </a:ext>
+            </a:extLst>
+          </p:cNvPr>
+          <p:cNvGrpSpPr/>
+          <p:nvPr/>
+        </p:nvGrpSpPr>
+        <p:grpSpPr>
+          <a:xfrm>
+            <a:off x="289486" y="5661975"/>
+            <a:ext cx="455760" cy="828360"/>
+            <a:chOff x="289486" y="5661975"/>
+            <a:chExt cx="455760" cy="828360"/>
+          </a:xfrm>
+        </p:grpSpPr>
+        <mc:AlternateContent xmlns:mc="http://schemas.openxmlformats.org/markup-compatibility/2006">
+          <mc:Choice xmlns:p14="http://schemas.microsoft.com/office/powerpoint/2010/main" Requires="p14">
+            <p:contentPart p14:bwMode="auto" r:id="rId4">
+              <p14:nvContentPartPr>
+                <p14:cNvPr id="4" name="Ink 3">
+                  <a:extLst>
+                    <a:ext uri="{FF2B5EF4-FFF2-40B4-BE49-F238E27FC236}">
+                      <a16:creationId xmlns:a16="http://schemas.microsoft.com/office/drawing/2014/main" id="{5B5EEF17-B05B-8821-0676-F673A156F643}"/>
+                    </a:ext>
+                  </a:extLst>
+                </p14:cNvPr>
+                <p14:cNvContentPartPr/>
+                <p14:nvPr/>
+              </p14:nvContentPartPr>
+              <p14:xfrm>
+                <a:off x="353566" y="5685015"/>
+                <a:ext cx="391680" cy="805320"/>
+              </p14:xfrm>
+            </p:contentPart>
+          </mc:Choice>
+          <mc:Fallback>
+            <p:pic>
+              <p:nvPicPr>
+                <p:cNvPr id="4" name="Ink 3">
+                  <a:extLst>
+                    <a:ext uri="{FF2B5EF4-FFF2-40B4-BE49-F238E27FC236}">
+                      <a16:creationId xmlns:a16="http://schemas.microsoft.com/office/drawing/2014/main" id="{5B5EEF17-B05B-8821-0676-F673A156F643}"/>
+                    </a:ext>
+                  </a:extLst>
+                </p:cNvPr>
+                <p:cNvPicPr/>
+                <p:nvPr/>
+              </p:nvPicPr>
+              <p:blipFill>
+                <a:blip r:embed="rId5"/>
+                <a:stretch>
+                  <a:fillRect/>
+                </a:stretch>
+              </p:blipFill>
+              <p:spPr>
+                <a:xfrm>
+                  <a:off x="347446" y="5678895"/>
+                  <a:ext cx="403920" cy="817560"/>
+                </a:xfrm>
+                <a:prstGeom prst="rect">
+                  <a:avLst/>
+                </a:prstGeom>
+              </p:spPr>
+            </p:pic>
+          </mc:Fallback>
+        </mc:AlternateContent>
+        <mc:AlternateContent xmlns:mc="http://schemas.openxmlformats.org/markup-compatibility/2006">
+          <mc:Choice xmlns:p14="http://schemas.microsoft.com/office/powerpoint/2010/main" Requires="p14">
+            <p:contentPart p14:bwMode="auto" r:id="rId6">
+              <p14:nvContentPartPr>
+                <p14:cNvPr id="6" name="Ink 5">
+                  <a:extLst>
+                    <a:ext uri="{FF2B5EF4-FFF2-40B4-BE49-F238E27FC236}">
+                      <a16:creationId xmlns:a16="http://schemas.microsoft.com/office/drawing/2014/main" id="{70680A27-66FE-65AB-083F-52E8C5106CA4}"/>
+                    </a:ext>
+                  </a:extLst>
+                </p14:cNvPr>
+                <p14:cNvContentPartPr/>
+                <p14:nvPr/>
+              </p14:nvContentPartPr>
+              <p14:xfrm>
+                <a:off x="289486" y="5661975"/>
+                <a:ext cx="181080" cy="189720"/>
+              </p14:xfrm>
+            </p:contentPart>
+          </mc:Choice>
+          <mc:Fallback>
+            <p:pic>
+              <p:nvPicPr>
+                <p:cNvPr id="6" name="Ink 5">
+                  <a:extLst>
+                    <a:ext uri="{FF2B5EF4-FFF2-40B4-BE49-F238E27FC236}">
+                      <a16:creationId xmlns:a16="http://schemas.microsoft.com/office/drawing/2014/main" id="{70680A27-66FE-65AB-083F-52E8C5106CA4}"/>
+                    </a:ext>
+                  </a:extLst>
+                </p:cNvPr>
+                <p:cNvPicPr/>
+                <p:nvPr/>
+              </p:nvPicPr>
+              <p:blipFill>
+                <a:blip r:embed="rId7"/>
+                <a:stretch>
+                  <a:fillRect/>
+                </a:stretch>
+              </p:blipFill>
+              <p:spPr>
+                <a:xfrm>
+                  <a:off x="283366" y="5655855"/>
+                  <a:ext cx="193320" cy="201960"/>
+                </a:xfrm>
+                <a:prstGeom prst="rect">
+                  <a:avLst/>
+                </a:prstGeom>
+              </p:spPr>
+            </p:pic>
+          </mc:Fallback>
+        </mc:AlternateContent>
+      </p:grpSp>
     </p:spTree>
     <p:extLst>
       <p:ext uri="{BB962C8B-B14F-4D97-AF65-F5344CB8AC3E}">
@@ -3626,6 +4819,60 @@
           </a:prstGeom>
         </p:spPr>
       </p:pic>
+      <p:sp>
+        <p:nvSpPr>
+          <p:cNvPr id="2" name="Rectangle 1">
+            <a:extLst>
+              <a:ext uri="{FF2B5EF4-FFF2-40B4-BE49-F238E27FC236}">
+                <a16:creationId xmlns:a16="http://schemas.microsoft.com/office/drawing/2014/main" id="{E42F30A1-CEC4-3DFF-06C6-1579C31D8296}"/>
+              </a:ext>
+            </a:extLst>
+          </p:cNvPr>
+          <p:cNvSpPr/>
+          <p:nvPr/>
+        </p:nvSpPr>
+        <p:spPr>
+          <a:xfrm>
+            <a:off x="744794" y="7197213"/>
+            <a:ext cx="3524864" cy="398206"/>
+          </a:xfrm>
+          <a:prstGeom prst="rect">
+            <a:avLst/>
+          </a:prstGeom>
+          <a:solidFill>
+            <a:schemeClr val="bg1"/>
+          </a:solidFill>
+          <a:ln>
+            <a:solidFill>
+              <a:schemeClr val="bg1"/>
+            </a:solidFill>
+          </a:ln>
+        </p:spPr>
+        <p:style>
+          <a:lnRef idx="2">
+            <a:schemeClr val="accent1">
+              <a:shade val="15000"/>
+            </a:schemeClr>
+          </a:lnRef>
+          <a:fillRef idx="1">
+            <a:schemeClr val="accent1"/>
+          </a:fillRef>
+          <a:effectRef idx="0">
+            <a:schemeClr val="accent1"/>
+          </a:effectRef>
+          <a:fontRef idx="minor">
+            <a:schemeClr val="lt1"/>
+          </a:fontRef>
+        </p:style>
+        <p:txBody>
+          <a:bodyPr rtlCol="0" anchor="ctr"/>
+          <a:lstStyle/>
+          <a:p>
+            <a:pPr algn="ctr"/>
+            <a:endParaRPr lang="en-US"/>
+          </a:p>
+        </p:txBody>
+      </p:sp>
     </p:spTree>
     <p:extLst>
       <p:ext uri="{BB962C8B-B14F-4D97-AF65-F5344CB8AC3E}">
@@ -3686,6 +4933,60 @@
           </a:prstGeom>
         </p:spPr>
       </p:pic>
+      <p:sp>
+        <p:nvSpPr>
+          <p:cNvPr id="2" name="Rectangle 1">
+            <a:extLst>
+              <a:ext uri="{FF2B5EF4-FFF2-40B4-BE49-F238E27FC236}">
+                <a16:creationId xmlns:a16="http://schemas.microsoft.com/office/drawing/2014/main" id="{C8BE3C99-C319-173B-139C-2CE18B2F960A}"/>
+              </a:ext>
+            </a:extLst>
+          </p:cNvPr>
+          <p:cNvSpPr/>
+          <p:nvPr/>
+        </p:nvSpPr>
+        <p:spPr>
+          <a:xfrm>
+            <a:off x="4977581" y="1812316"/>
+            <a:ext cx="1880419" cy="414690"/>
+          </a:xfrm>
+          <a:prstGeom prst="rect">
+            <a:avLst/>
+          </a:prstGeom>
+          <a:solidFill>
+            <a:schemeClr val="bg1"/>
+          </a:solidFill>
+          <a:ln>
+            <a:solidFill>
+              <a:schemeClr val="bg1"/>
+            </a:solidFill>
+          </a:ln>
+        </p:spPr>
+        <p:style>
+          <a:lnRef idx="2">
+            <a:schemeClr val="accent1">
+              <a:shade val="15000"/>
+            </a:schemeClr>
+          </a:lnRef>
+          <a:fillRef idx="1">
+            <a:schemeClr val="accent1"/>
+          </a:fillRef>
+          <a:effectRef idx="0">
+            <a:schemeClr val="accent1"/>
+          </a:effectRef>
+          <a:fontRef idx="minor">
+            <a:schemeClr val="lt1"/>
+          </a:fontRef>
+        </p:style>
+        <p:txBody>
+          <a:bodyPr rtlCol="0" anchor="ctr"/>
+          <a:lstStyle/>
+          <a:p>
+            <a:pPr algn="ctr"/>
+            <a:endParaRPr lang="en-US"/>
+          </a:p>
+        </p:txBody>
+      </p:sp>
     </p:spTree>
     <p:extLst>
       <p:ext uri="{BB962C8B-B14F-4D97-AF65-F5344CB8AC3E}">
